--- a/media/resources/files/Onduktar_Koboytuu_BoluuXO.pptx
+++ b/media/resources/files/Onduktar_Koboytuu_BoluuXO.pptx
@@ -7351,7 +7351,7 @@
                 <a:ea typeface="+mn-ea"/>
                 <a:cs typeface="+mn-cs"/>
               </a:rPr>
-              <a:t>Турдуу пикирлер учун ыраазычылык билдиребиз.</a:t>
+              <a:t>Түрдүү пикирлер үчүн ыраазычылык билдиребиз.</a:t>
             </a:r>
           </a:p>
           <a:p>

--- a/media/resources/files/Onduktar_Koboytuu_BoluuXO.pptx
+++ b/media/resources/files/Onduktar_Koboytuu_BoluuXO.pptx
@@ -3881,7 +3881,7 @@
                 <a:ea typeface="+mn-ea"/>
                 <a:cs typeface="Arial" panose="020B0604020202020204" pitchFamily="34" charset="0"/>
               </a:rPr>
-              <a:t>Мугалим үчүн жооп баракчасы жана таратма материалдар камтылган.</a:t>
+              <a:t>Мугалим үчүн жооп барагы жана таратма материалдар бар.</a:t>
             </a:r>
           </a:p>
           <a:p>
@@ -3950,7 +3950,7 @@
                 <a:ea typeface="+mn-ea"/>
                 <a:cs typeface="Arial" panose="020B0604020202020204" pitchFamily="34" charset="0"/>
               </a:rPr>
-              <a:t>Кайсы команда туура жооп бергенине жараша '</a:t>
+              <a:t>Туура жооп берген командага жараша «</a:t>
             </a:r>
             <a:r>
               <a:rPr kumimoji="0" lang="en-GB" sz="2000" b="0" i="0" u="sng" strike="noStrike" kern="1200" cap="none" spc="0" normalizeH="0" baseline="0" noProof="0" dirty="0">
@@ -3967,7 +3967,7 @@
                 <a:ea typeface="+mn-ea"/>
                 <a:cs typeface="Arial" panose="020B0604020202020204" pitchFamily="34" charset="0"/>
               </a:rPr>
-              <a:t>X' </a:t>
+              <a:t>X» </a:t>
             </a:r>
             <a:r>
               <a:rPr kumimoji="0" lang="ru-RU" sz="2000" b="0" i="0" u="sng" strike="noStrike" kern="1200" cap="none" spc="0" normalizeH="0" baseline="0" noProof="0" dirty="0">
@@ -3984,7 +3984,7 @@
                 <a:ea typeface="+mn-ea"/>
                 <a:cs typeface="Arial" panose="020B0604020202020204" pitchFamily="34" charset="0"/>
               </a:rPr>
-              <a:t>же '</a:t>
+              <a:t>же «</a:t>
             </a:r>
             <a:r>
               <a:rPr kumimoji="0" lang="en-GB" sz="2000" b="0" i="0" u="sng" strike="noStrike" kern="1200" cap="none" spc="0" normalizeH="0" baseline="0" noProof="0" dirty="0">
@@ -4001,7 +4001,7 @@
                 <a:ea typeface="+mn-ea"/>
                 <a:cs typeface="Arial" panose="020B0604020202020204" pitchFamily="34" charset="0"/>
               </a:rPr>
-              <a:t>O' </a:t>
+              <a:t>O» </a:t>
             </a:r>
             <a:r>
               <a:rPr kumimoji="0" lang="ru-RU" sz="2000" b="0" i="0" u="sng" strike="noStrike" kern="1200" cap="none" spc="0" normalizeH="0" baseline="0" noProof="0" dirty="0">
@@ -4018,7 +4018,7 @@
                 <a:ea typeface="+mn-ea"/>
                 <a:cs typeface="Arial" panose="020B0604020202020204" pitchFamily="34" charset="0"/>
               </a:rPr>
-              <a:t>баскычын басыңыз/тийип коюңуз</a:t>
+              <a:t>баскычын басыңыз</a:t>
             </a:r>
             <a:r>
               <a:rPr kumimoji="0" lang="en-GB" sz="2000" b="0" i="0" u="none" strike="noStrike" kern="1200" cap="none" spc="0" normalizeH="0" baseline="0" noProof="0" dirty="0">
@@ -4692,7 +4692,7 @@
             <a:pPr algn="ctr"/>
             <a:r>
               <a:rPr lang="en-GB" sz="4400" dirty="0"/>
-              <a:t>5 ÷ 0.2</a:t>
+              <a:t>5 ÷ 0,2</a:t>
             </a:r>
           </a:p>
         </p:txBody>
@@ -4733,7 +4733,7 @@
             <a:pPr algn="ctr"/>
             <a:r>
               <a:rPr lang="en-GB" sz="4400" dirty="0"/>
-              <a:t>42 ÷ 1.2</a:t>
+              <a:t>42 ÷ 1,2</a:t>
             </a:r>
           </a:p>
         </p:txBody>
@@ -4774,7 +4774,7 @@
             <a:pPr algn="ctr"/>
             <a:r>
               <a:rPr lang="en-GB" sz="4400" dirty="0"/>
-              <a:t>19.2 ÷ 1.6</a:t>
+              <a:t>19,2 ÷ 1,6</a:t>
             </a:r>
           </a:p>
         </p:txBody>
@@ -4815,7 +4815,7 @@
             <a:pPr algn="ctr"/>
             <a:r>
               <a:rPr lang="en-GB" sz="4400" dirty="0"/>
-              <a:t>4 ÷ 0.8</a:t>
+              <a:t>4 ÷ 0,8</a:t>
             </a:r>
           </a:p>
         </p:txBody>
@@ -4856,7 +4856,7 @@
             <a:pPr algn="ctr"/>
             <a:r>
               <a:rPr lang="en-GB" sz="4400" dirty="0"/>
-              <a:t>25.9 ÷ 0.7</a:t>
+              <a:t>25,9 ÷ 0,7</a:t>
             </a:r>
           </a:p>
         </p:txBody>
@@ -4934,7 +4934,7 @@
             <a:pPr algn="ctr"/>
             <a:r>
               <a:rPr lang="en-GB" sz="4400" dirty="0"/>
-              <a:t>1.3 × 0.5</a:t>
+              <a:t>1,3 × 0,5</a:t>
             </a:r>
           </a:p>
         </p:txBody>
@@ -4975,7 +4975,7 @@
             <a:pPr algn="ctr"/>
             <a:r>
               <a:rPr lang="en-GB" sz="4400" dirty="0"/>
-              <a:t>6 × 1.9</a:t>
+              <a:t>6 × 1,9</a:t>
             </a:r>
           </a:p>
         </p:txBody>
@@ -5016,7 +5016,7 @@
             <a:pPr algn="ctr"/>
             <a:r>
               <a:rPr lang="en-GB" sz="4400" dirty="0"/>
-              <a:t>0.7 × 0.6</a:t>
+              <a:t>0,7 × 0,6</a:t>
             </a:r>
           </a:p>
         </p:txBody>
@@ -5057,7 +5057,7 @@
             <a:pPr algn="ctr"/>
             <a:r>
               <a:rPr lang="en-GB" sz="4400" dirty="0"/>
-              <a:t>1.2 × 1.5</a:t>
+              <a:t>1,2 × 1,5</a:t>
             </a:r>
           </a:p>
         </p:txBody>
